--- a/presentations/Hotel_No-Show_DSS_v13.pptx
+++ b/presentations/Hotel_No-Show_DSS_v13.pptx
@@ -4536,11 +4536,66 @@
           </a:prstGeom>
         </p:spPr>
       </p:pic>
+      <p:pic>
+        <p:nvPicPr>
+          <p:cNvPr id="3" name="DSS_DEMO.mp4">
+            <a:hlinkClick r:id="" action="ppaction://media"/>
+          </p:cNvPr>
+          <p:cNvPicPr>
+            <a:picLocks noChangeAspect="1"/>
+          </p:cNvPicPr>
+          <p:nvPr>
+            <a:videoFile r:link="rId4"/>
+            <p:extLst>
+              <p:ext uri="{DAA4B4D4-6D71-4841-9C94-3DE7FCFB9230}">
+                <p14:media xmlns:p14="http://schemas.microsoft.com/office/powerpoint/2010/main" r:embed="rId3"/>
+              </p:ext>
+            </p:extLst>
+          </p:nvPr>
+        </p:nvPicPr>
+        <p:blipFill>
+          <a:blip r:embed="rId5"/>
+          <a:stretch>
+            <a:fillRect/>
+          </a:stretch>
+        </p:blipFill>
+        <p:spPr>
+          <a:xfrm>
+            <a:off x="2436876" y="1371600"/>
+            <a:ext cx="7315200" cy="4114800"/>
+          </a:xfrm>
+          <a:prstGeom prst="rect">
+            <a:avLst/>
+          </a:prstGeom>
+        </p:spPr>
+      </p:pic>
     </p:spTree>
   </p:cSld>
   <p:clrMapOvr>
     <a:masterClrMapping/>
   </p:clrMapOvr>
+  <p:timing>
+    <p:tnLst>
+      <p:par>
+        <p:cTn id="1" dur="indefinite" restart="never" nodeType="tmRoot">
+          <p:childTnLst>
+            <p:video>
+              <p:cMediaNode vol="80000">
+                <p:cTn id="2" fill="hold" display="0">
+                  <p:stCondLst>
+                    <p:cond delay="indefinite"/>
+                  </p:stCondLst>
+                </p:cTn>
+                <p:tgtEl>
+                  <p:spTgt spid="3"/>
+                </p:tgtEl>
+              </p:cMediaNode>
+            </p:video>
+          </p:childTnLst>
+        </p:cTn>
+      </p:par>
+    </p:tnLst>
+  </p:timing>
 </p:sld>
 </file>
 
